--- a/examples/ppt/charts/charts-doughnut.pptx
+++ b/examples/ppt/charts/charts-doughnut.pptx
@@ -5,14 +5,14 @@
     <p:sldMasterId xmlns:r="http://schemas.openxmlformats.org/officeDocument/2006/relationships" id="2147483648" r:id="rId1"/>
   </p:sldMasterIdLst>
   <p:sldIdLst>
-    <p:sldId id="256" r:id="R8eb83a1e95504f33"/>
-    <p:sldId id="257" r:id="Rb1cc40d70afc481c"/>
-    <p:sldId id="258" r:id="R58f7699891e24be9"/>
-    <p:sldId id="259" r:id="R9f46ef941d1843af"/>
-    <p:sldId id="260" r:id="Rd549ee54cb6442bd"/>
-    <p:sldId id="261" r:id="R526639cd4929413d"/>
-    <p:sldId id="262" r:id="R0e9d6e7305874850"/>
-    <p:sldId id="263" r:id="R005356214009409f"/>
+    <p:sldId id="256" r:id="R55d31a90bfaa4719"/>
+    <p:sldId id="257" r:id="Rff6a9265ff0f4a37"/>
+    <p:sldId id="258" r:id="Ra22de89e881846da"/>
+    <p:sldId id="259" r:id="Rcaf598cb70be4e3b"/>
+    <p:sldId id="260" r:id="R5e540494ac3642e2"/>
+    <p:sldId id="261" r:id="Ra63827a1d7e64576"/>
+    <p:sldId id="262" r:id="R987ab037f7c74808"/>
+    <p:sldId id="263" r:id="R8c50aee101b74967"/>
   </p:sldIdLst>
   <p:sldSz cx="12192000" cy="6858000"/>
   <p:notesSz cx="6858000" cy="9144000"/>
@@ -287,7 +287,7 @@
 </file>
 
 <file path=ppt/slideMasters/slideMaster1.xml><?xml version="1.0" encoding="utf-8"?>
-<p:sldMaster xmlns:p="http://schemas.openxmlformats.org/presentationml/2006/main">
+<p:sldMaster xmlns:r="http://schemas.openxmlformats.org/officeDocument/2006/relationships" xmlns:p="http://schemas.openxmlformats.org/presentationml/2006/main">
   <p:cSld>
     <p:spTree>
       <p:nvGrpSpPr>
@@ -456,6 +456,7 @@
             </c:numLit>
           </c:val>
         </c:ser>
+        <c:firstSliceAng val="90"/>
         <c:holeSize val="50"/>
       </c:doughnutChart>
     </c:plotArea>
@@ -536,6 +537,7 @@
             </c:numLit>
           </c:val>
         </c:ser>
+        <c:firstSliceAng val="180"/>
         <c:holeSize val="50"/>
       </c:doughnutChart>
     </c:plotArea>
@@ -616,6 +618,7 @@
             </c:numLit>
           </c:val>
         </c:ser>
+        <c:firstSliceAng val="270"/>
         <c:holeSize val="50"/>
       </c:doughnutChart>
     </c:plotArea>
@@ -702,10 +705,12 @@
             <a:lstStyle xmlns:a="http://schemas.openxmlformats.org/drawingml/2006/main"/>
             <a:p xmlns:a="http://schemas.openxmlformats.org/drawingml/2006/main">
               <a:pPr>
-                <a:defRPr sz="1000" b="0">
+                <a:defRPr sz="1000">
                   <a:solidFill>
                     <a:srgbClr val="333333"/>
                   </a:solidFill>
+                  <a:latin typeface="Calibri"/>
+                  <a:ea typeface="Calibri"/>
                 </a:defRPr>
               </a:pPr>
             </a:p>
@@ -802,10 +807,12 @@
             <a:lstStyle xmlns:a="http://schemas.openxmlformats.org/drawingml/2006/main"/>
             <a:p xmlns:a="http://schemas.openxmlformats.org/drawingml/2006/main">
               <a:pPr>
-                <a:defRPr sz="1000" b="0">
+                <a:defRPr sz="1000">
                   <a:solidFill>
                     <a:srgbClr val="333333"/>
                   </a:solidFill>
+                  <a:latin typeface="Calibri"/>
+                  <a:ea typeface="Calibri"/>
                 </a:defRPr>
               </a:pPr>
             </a:p>
@@ -2990,6 +2997,48 @@
             </c:numLit>
           </c:val>
         </c:ser>
+        <c:ser>
+          <c:idx val="1"/>
+          <c:order val="1"/>
+          <c:tx>
+            <c:v>This</c:v>
+          </c:tx>
+          <c:cat>
+            <c:strLit>
+              <c:ptCount val="4"/>
+              <c:pt idx="0">
+                <c:v>North</c:v>
+              </c:pt>
+              <c:pt idx="1">
+                <c:v>South</c:v>
+              </c:pt>
+              <c:pt idx="2">
+                <c:v>East</c:v>
+              </c:pt>
+              <c:pt idx="3">
+                <c:v>West</c:v>
+              </c:pt>
+            </c:strLit>
+          </c:cat>
+          <c:val>
+            <c:numLit>
+              <c:formatCode>General</c:formatCode>
+              <c:ptCount val="4"/>
+              <c:pt idx="0">
+                <c:v>30</c:v>
+              </c:pt>
+              <c:pt idx="1">
+                <c:v>25</c:v>
+              </c:pt>
+              <c:pt idx="2">
+                <c:v>28</c:v>
+              </c:pt>
+              <c:pt idx="3">
+                <c:v>17</c:v>
+              </c:pt>
+            </c:numLit>
+          </c:val>
+        </c:ser>
         <c:holeSize val="40"/>
       </c:doughnutChart>
     </c:plotArea>
@@ -3070,6 +3119,90 @@
             </c:numLit>
           </c:val>
         </c:ser>
+        <c:ser>
+          <c:idx val="1"/>
+          <c:order val="1"/>
+          <c:tx>
+            <c:v>Region2</c:v>
+          </c:tx>
+          <c:cat>
+            <c:strLit>
+              <c:ptCount val="4"/>
+              <c:pt idx="0">
+                <c:v>North</c:v>
+              </c:pt>
+              <c:pt idx="1">
+                <c:v>South</c:v>
+              </c:pt>
+              <c:pt idx="2">
+                <c:v>East</c:v>
+              </c:pt>
+              <c:pt idx="3">
+                <c:v>West</c:v>
+              </c:pt>
+            </c:strLit>
+          </c:cat>
+          <c:val>
+            <c:numLit>
+              <c:formatCode>General</c:formatCode>
+              <c:ptCount val="4"/>
+              <c:pt idx="0">
+                <c:v>25</c:v>
+              </c:pt>
+              <c:pt idx="1">
+                <c:v>30</c:v>
+              </c:pt>
+              <c:pt idx="2">
+                <c:v>20</c:v>
+              </c:pt>
+              <c:pt idx="3">
+                <c:v>25</c:v>
+              </c:pt>
+            </c:numLit>
+          </c:val>
+        </c:ser>
+        <c:ser>
+          <c:idx val="2"/>
+          <c:order val="2"/>
+          <c:tx>
+            <c:v>Region3</c:v>
+          </c:tx>
+          <c:cat>
+            <c:strLit>
+              <c:ptCount val="4"/>
+              <c:pt idx="0">
+                <c:v>North</c:v>
+              </c:pt>
+              <c:pt idx="1">
+                <c:v>South</c:v>
+              </c:pt>
+              <c:pt idx="2">
+                <c:v>East</c:v>
+              </c:pt>
+              <c:pt idx="3">
+                <c:v>West</c:v>
+              </c:pt>
+            </c:strLit>
+          </c:cat>
+          <c:val>
+            <c:numLit>
+              <c:formatCode>General</c:formatCode>
+              <c:ptCount val="4"/>
+              <c:pt idx="0">
+                <c:v>20</c:v>
+              </c:pt>
+              <c:pt idx="1">
+                <c:v>25</c:v>
+              </c:pt>
+              <c:pt idx="2">
+                <c:v>30</c:v>
+              </c:pt>
+              <c:pt idx="3">
+                <c:v>25</c:v>
+              </c:pt>
+            </c:numLit>
+          </c:val>
+        </c:ser>
         <c:holeSize val="30"/>
       </c:doughnutChart>
     </c:plotArea>
@@ -3146,6 +3279,48 @@
               </c:pt>
               <c:pt idx="3">
                 <c:v>20</c:v>
+              </c:pt>
+            </c:numLit>
+          </c:val>
+        </c:ser>
+        <c:ser>
+          <c:idx val="1"/>
+          <c:order val="1"/>
+          <c:tx>
+            <c:v>This</c:v>
+          </c:tx>
+          <c:cat>
+            <c:strLit>
+              <c:ptCount val="4"/>
+              <c:pt idx="0">
+                <c:v>North</c:v>
+              </c:pt>
+              <c:pt idx="1">
+                <c:v>South</c:v>
+              </c:pt>
+              <c:pt idx="2">
+                <c:v>East</c:v>
+              </c:pt>
+              <c:pt idx="3">
+                <c:v>West</c:v>
+              </c:pt>
+            </c:strLit>
+          </c:cat>
+          <c:val>
+            <c:numLit>
+              <c:formatCode>General</c:formatCode>
+              <c:ptCount val="4"/>
+              <c:pt idx="0">
+                <c:v>30</c:v>
+              </c:pt>
+              <c:pt idx="1">
+                <c:v>25</c:v>
+              </c:pt>
+              <c:pt idx="2">
+                <c:v>28</c:v>
+              </c:pt>
+              <c:pt idx="3">
+                <c:v>17</c:v>
               </c:pt>
             </c:numLit>
           </c:val>
@@ -3237,6 +3412,7 @@
             </c:numLit>
           </c:val>
         </c:ser>
+        <c:firstSliceAng val="0"/>
         <c:holeSize val="50"/>
       </c:doughnutChart>
     </c:plotArea>
@@ -3262,8 +3438,8 @@
       <p:grpSpPr/>
       <p:sp>
         <p:nvSpPr>
-          <p:cNvPr id="10000" name="TextBox 1"/>
-          <p:cNvSpPr/>
+          <p:cNvPr id="100000" name="TextBox 1"/>
+          <p:cNvSpPr txBox="1"/>
           <p:nvPr/>
         </p:nvSpPr>
         <p:spPr>
@@ -3290,7 +3466,7 @@
       </p:sp>
       <p:graphicFrame>
         <p:nvGraphicFramePr>
-          <p:cNvPr id="10001" name="holeSize=10"/>
+          <p:cNvPr id="100001" name="holeSize=10"/>
           <p:cNvGraphicFramePr/>
           <p:nvPr/>
         </p:nvGraphicFramePr>
@@ -3300,13 +3476,13 @@
         </p:xfrm>
         <a:graphic xmlns:a="http://schemas.openxmlformats.org/drawingml/2006/main">
           <a:graphicData uri="http://schemas.openxmlformats.org/drawingml/2006/chart">
-            <c:chart xmlns:r="http://schemas.openxmlformats.org/officeDocument/2006/relationships" xmlns:c="http://schemas.openxmlformats.org/drawingml/2006/chart" r:id="R193c44bbfeae4220"/>
+            <c:chart xmlns:r="http://schemas.openxmlformats.org/officeDocument/2006/relationships" xmlns:c="http://schemas.openxmlformats.org/drawingml/2006/chart" r:id="R5723b6574215438b"/>
           </a:graphicData>
         </a:graphic>
       </p:graphicFrame>
       <p:graphicFrame>
         <p:nvGraphicFramePr>
-          <p:cNvPr id="10002" name="holeSize=30"/>
+          <p:cNvPr id="100002" name="holeSize=30"/>
           <p:cNvGraphicFramePr/>
           <p:nvPr/>
         </p:nvGraphicFramePr>
@@ -3316,13 +3492,13 @@
         </p:xfrm>
         <a:graphic xmlns:a="http://schemas.openxmlformats.org/drawingml/2006/main">
           <a:graphicData uri="http://schemas.openxmlformats.org/drawingml/2006/chart">
-            <c:chart xmlns:r="http://schemas.openxmlformats.org/officeDocument/2006/relationships" xmlns:c="http://schemas.openxmlformats.org/drawingml/2006/chart" r:id="R11216150bbfb4e86"/>
+            <c:chart xmlns:r="http://schemas.openxmlformats.org/officeDocument/2006/relationships" xmlns:c="http://schemas.openxmlformats.org/drawingml/2006/chart" r:id="Rea857f145bb44c82"/>
           </a:graphicData>
         </a:graphic>
       </p:graphicFrame>
       <p:graphicFrame>
         <p:nvGraphicFramePr>
-          <p:cNvPr id="10003" name="holeSize=55"/>
+          <p:cNvPr id="100003" name="holeSize=55"/>
           <p:cNvGraphicFramePr/>
           <p:nvPr/>
         </p:nvGraphicFramePr>
@@ -3332,13 +3508,13 @@
         </p:xfrm>
         <a:graphic xmlns:a="http://schemas.openxmlformats.org/drawingml/2006/main">
           <a:graphicData uri="http://schemas.openxmlformats.org/drawingml/2006/chart">
-            <c:chart xmlns:r="http://schemas.openxmlformats.org/officeDocument/2006/relationships" xmlns:c="http://schemas.openxmlformats.org/drawingml/2006/chart" r:id="R970f1c2177224765"/>
+            <c:chart xmlns:r="http://schemas.openxmlformats.org/officeDocument/2006/relationships" xmlns:c="http://schemas.openxmlformats.org/drawingml/2006/chart" r:id="R701031ba649e47fd"/>
           </a:graphicData>
         </a:graphic>
       </p:graphicFrame>
       <p:graphicFrame>
         <p:nvGraphicFramePr>
-          <p:cNvPr id="10004" name="holeSize=75"/>
+          <p:cNvPr id="100004" name="holeSize=75"/>
           <p:cNvGraphicFramePr/>
           <p:nvPr/>
         </p:nvGraphicFramePr>
@@ -3348,7 +3524,7 @@
         </p:xfrm>
         <a:graphic xmlns:a="http://schemas.openxmlformats.org/drawingml/2006/main">
           <a:graphicData uri="http://schemas.openxmlformats.org/drawingml/2006/chart">
-            <c:chart xmlns:r="http://schemas.openxmlformats.org/officeDocument/2006/relationships" xmlns:c="http://schemas.openxmlformats.org/drawingml/2006/chart" r:id="R1bf15d4762f34793"/>
+            <c:chart xmlns:r="http://schemas.openxmlformats.org/officeDocument/2006/relationships" xmlns:c="http://schemas.openxmlformats.org/drawingml/2006/chart" r:id="R6bb9976e5af54ea4"/>
           </a:graphicData>
         </a:graphic>
       </p:graphicFrame>
@@ -3369,8 +3545,8 @@
       <p:grpSpPr/>
       <p:sp>
         <p:nvSpPr>
-          <p:cNvPr id="10005" name="TextBox 1"/>
-          <p:cNvSpPr/>
+          <p:cNvPr id="100005" name="TextBox 1"/>
+          <p:cNvSpPr txBox="1"/>
           <p:nvPr/>
         </p:nvSpPr>
         <p:spPr>
@@ -3397,7 +3573,7 @@
       </p:sp>
       <p:graphicFrame>
         <p:nvGraphicFramePr>
-          <p:cNvPr id="10006" name="single ring"/>
+          <p:cNvPr id="100006" name="single ring"/>
           <p:cNvGraphicFramePr/>
           <p:nvPr/>
         </p:nvGraphicFramePr>
@@ -3407,13 +3583,13 @@
         </p:xfrm>
         <a:graphic xmlns:a="http://schemas.openxmlformats.org/drawingml/2006/main">
           <a:graphicData uri="http://schemas.openxmlformats.org/drawingml/2006/chart">
-            <c:chart xmlns:r="http://schemas.openxmlformats.org/officeDocument/2006/relationships" xmlns:c="http://schemas.openxmlformats.org/drawingml/2006/chart" r:id="R33a6f9e8882e4d2c"/>
+            <c:chart xmlns:r="http://schemas.openxmlformats.org/officeDocument/2006/relationships" xmlns:c="http://schemas.openxmlformats.org/drawingml/2006/chart" r:id="R2f6fd3c34ace47a1"/>
           </a:graphicData>
         </a:graphic>
       </p:graphicFrame>
       <p:graphicFrame>
         <p:nvGraphicFramePr>
-          <p:cNvPr id="10007" name="two rings"/>
+          <p:cNvPr id="100007" name="two rings"/>
           <p:cNvGraphicFramePr/>
           <p:nvPr/>
         </p:nvGraphicFramePr>
@@ -3423,13 +3599,13 @@
         </p:xfrm>
         <a:graphic xmlns:a="http://schemas.openxmlformats.org/drawingml/2006/main">
           <a:graphicData uri="http://schemas.openxmlformats.org/drawingml/2006/chart">
-            <c:chart xmlns:r="http://schemas.openxmlformats.org/officeDocument/2006/relationships" xmlns:c="http://schemas.openxmlformats.org/drawingml/2006/chart" r:id="Rc574dfd641e3416e"/>
+            <c:chart xmlns:r="http://schemas.openxmlformats.org/officeDocument/2006/relationships" xmlns:c="http://schemas.openxmlformats.org/drawingml/2006/chart" r:id="R7fa049240cdf4b68"/>
           </a:graphicData>
         </a:graphic>
       </p:graphicFrame>
       <p:graphicFrame>
         <p:nvGraphicFramePr>
-          <p:cNvPr id="10008" name="three rings"/>
+          <p:cNvPr id="100008" name="three rings"/>
           <p:cNvGraphicFramePr/>
           <p:nvPr/>
         </p:nvGraphicFramePr>
@@ -3439,13 +3615,13 @@
         </p:xfrm>
         <a:graphic xmlns:a="http://schemas.openxmlformats.org/drawingml/2006/main">
           <a:graphicData uri="http://schemas.openxmlformats.org/drawingml/2006/chart">
-            <c:chart xmlns:r="http://schemas.openxmlformats.org/officeDocument/2006/relationships" xmlns:c="http://schemas.openxmlformats.org/drawingml/2006/chart" r:id="Raf58eb6e58744350"/>
+            <c:chart xmlns:r="http://schemas.openxmlformats.org/officeDocument/2006/relationships" xmlns:c="http://schemas.openxmlformats.org/drawingml/2006/chart" r:id="Ra6eed4ef73204c85"/>
           </a:graphicData>
         </a:graphic>
       </p:graphicFrame>
       <p:graphicFrame>
         <p:nvGraphicFramePr>
-          <p:cNvPr id="10009" name="two rings + dataLabels=percent"/>
+          <p:cNvPr id="100009" name="two rings + dataLabels=percent"/>
           <p:cNvGraphicFramePr/>
           <p:nvPr/>
         </p:nvGraphicFramePr>
@@ -3455,7 +3631,7 @@
         </p:xfrm>
         <a:graphic xmlns:a="http://schemas.openxmlformats.org/drawingml/2006/main">
           <a:graphicData uri="http://schemas.openxmlformats.org/drawingml/2006/chart">
-            <c:chart xmlns:r="http://schemas.openxmlformats.org/officeDocument/2006/relationships" xmlns:c="http://schemas.openxmlformats.org/drawingml/2006/chart" r:id="Rd8063ad246dc4e2a"/>
+            <c:chart xmlns:r="http://schemas.openxmlformats.org/officeDocument/2006/relationships" xmlns:c="http://schemas.openxmlformats.org/drawingml/2006/chart" r:id="Rfd5a894d32664721"/>
           </a:graphicData>
         </a:graphic>
       </p:graphicFrame>
@@ -3476,8 +3652,8 @@
       <p:grpSpPr/>
       <p:sp>
         <p:nvSpPr>
-          <p:cNvPr id="10010" name="TextBox 1"/>
-          <p:cNvSpPr/>
+          <p:cNvPr id="100010" name="TextBox 1"/>
+          <p:cNvSpPr txBox="1"/>
           <p:nvPr/>
         </p:nvSpPr>
         <p:spPr>
@@ -3504,7 +3680,7 @@
       </p:sp>
       <p:graphicFrame>
         <p:nvGraphicFramePr>
-          <p:cNvPr id="10011" name="firstSliceAngle=0"/>
+          <p:cNvPr id="100011" name="firstSliceAngle=0"/>
           <p:cNvGraphicFramePr/>
           <p:nvPr/>
         </p:nvGraphicFramePr>
@@ -3514,13 +3690,13 @@
         </p:xfrm>
         <a:graphic xmlns:a="http://schemas.openxmlformats.org/drawingml/2006/main">
           <a:graphicData uri="http://schemas.openxmlformats.org/drawingml/2006/chart">
-            <c:chart xmlns:r="http://schemas.openxmlformats.org/officeDocument/2006/relationships" xmlns:c="http://schemas.openxmlformats.org/drawingml/2006/chart" r:id="Rf9754f6e66024bcf"/>
+            <c:chart xmlns:r="http://schemas.openxmlformats.org/officeDocument/2006/relationships" xmlns:c="http://schemas.openxmlformats.org/drawingml/2006/chart" r:id="Rd2fe96db9e84481f"/>
           </a:graphicData>
         </a:graphic>
       </p:graphicFrame>
       <p:graphicFrame>
         <p:nvGraphicFramePr>
-          <p:cNvPr id="10012" name="firstSliceAngle=90"/>
+          <p:cNvPr id="100012" name="firstSliceAngle=90"/>
           <p:cNvGraphicFramePr/>
           <p:nvPr/>
         </p:nvGraphicFramePr>
@@ -3530,13 +3706,13 @@
         </p:xfrm>
         <a:graphic xmlns:a="http://schemas.openxmlformats.org/drawingml/2006/main">
           <a:graphicData uri="http://schemas.openxmlformats.org/drawingml/2006/chart">
-            <c:chart xmlns:r="http://schemas.openxmlformats.org/officeDocument/2006/relationships" xmlns:c="http://schemas.openxmlformats.org/drawingml/2006/chart" r:id="Rb717cf2802694f37"/>
+            <c:chart xmlns:r="http://schemas.openxmlformats.org/officeDocument/2006/relationships" xmlns:c="http://schemas.openxmlformats.org/drawingml/2006/chart" r:id="R9be15c55b8d44e48"/>
           </a:graphicData>
         </a:graphic>
       </p:graphicFrame>
       <p:graphicFrame>
         <p:nvGraphicFramePr>
-          <p:cNvPr id="10013" name="firstSliceAngle=180"/>
+          <p:cNvPr id="100013" name="firstSliceAngle=180"/>
           <p:cNvGraphicFramePr/>
           <p:nvPr/>
         </p:nvGraphicFramePr>
@@ -3546,13 +3722,13 @@
         </p:xfrm>
         <a:graphic xmlns:a="http://schemas.openxmlformats.org/drawingml/2006/main">
           <a:graphicData uri="http://schemas.openxmlformats.org/drawingml/2006/chart">
-            <c:chart xmlns:r="http://schemas.openxmlformats.org/officeDocument/2006/relationships" xmlns:c="http://schemas.openxmlformats.org/drawingml/2006/chart" r:id="R54fddd2f1af8482c"/>
+            <c:chart xmlns:r="http://schemas.openxmlformats.org/officeDocument/2006/relationships" xmlns:c="http://schemas.openxmlformats.org/drawingml/2006/chart" r:id="R2bd27658f5054be0"/>
           </a:graphicData>
         </a:graphic>
       </p:graphicFrame>
       <p:graphicFrame>
         <p:nvGraphicFramePr>
-          <p:cNvPr id="10014" name="firstSliceAngle=270"/>
+          <p:cNvPr id="100014" name="firstSliceAngle=270"/>
           <p:cNvGraphicFramePr/>
           <p:nvPr/>
         </p:nvGraphicFramePr>
@@ -3562,7 +3738,7 @@
         </p:xfrm>
         <a:graphic xmlns:a="http://schemas.openxmlformats.org/drawingml/2006/main">
           <a:graphicData uri="http://schemas.openxmlformats.org/drawingml/2006/chart">
-            <c:chart xmlns:r="http://schemas.openxmlformats.org/officeDocument/2006/relationships" xmlns:c="http://schemas.openxmlformats.org/drawingml/2006/chart" r:id="R00be3c63b4594c6d"/>
+            <c:chart xmlns:r="http://schemas.openxmlformats.org/officeDocument/2006/relationships" xmlns:c="http://schemas.openxmlformats.org/drawingml/2006/chart" r:id="R778f685d6452496e"/>
           </a:graphicData>
         </a:graphic>
       </p:graphicFrame>
@@ -3583,8 +3759,8 @@
       <p:grpSpPr/>
       <p:sp>
         <p:nvSpPr>
-          <p:cNvPr id="10015" name="TextBox 1"/>
-          <p:cNvSpPr/>
+          <p:cNvPr id="100015" name="TextBox 1"/>
+          <p:cNvSpPr txBox="1"/>
           <p:nvPr/>
         </p:nvSpPr>
         <p:spPr>
@@ -3611,7 +3787,7 @@
       </p:sp>
       <p:graphicFrame>
         <p:nvGraphicFramePr>
-          <p:cNvPr id="10016" name="dataLabels=percent"/>
+          <p:cNvPr id="100016" name="dataLabels=percent"/>
           <p:cNvGraphicFramePr/>
           <p:nvPr/>
         </p:nvGraphicFramePr>
@@ -3621,13 +3797,13 @@
         </p:xfrm>
         <a:graphic xmlns:a="http://schemas.openxmlformats.org/drawingml/2006/main">
           <a:graphicData uri="http://schemas.openxmlformats.org/drawingml/2006/chart">
-            <c:chart xmlns:r="http://schemas.openxmlformats.org/officeDocument/2006/relationships" xmlns:c="http://schemas.openxmlformats.org/drawingml/2006/chart" r:id="Rcf142a4f31d34e66"/>
+            <c:chart xmlns:r="http://schemas.openxmlformats.org/officeDocument/2006/relationships" xmlns:c="http://schemas.openxmlformats.org/drawingml/2006/chart" r:id="Ra792dfcf051f490b"/>
           </a:graphicData>
         </a:graphic>
       </p:graphicFrame>
       <p:graphicFrame>
         <p:nvGraphicFramePr>
-          <p:cNvPr id="10017" name="percent,category"/>
+          <p:cNvPr id="100017" name="percent,category"/>
           <p:cNvGraphicFramePr/>
           <p:nvPr/>
         </p:nvGraphicFramePr>
@@ -3637,13 +3813,13 @@
         </p:xfrm>
         <a:graphic xmlns:a="http://schemas.openxmlformats.org/drawingml/2006/main">
           <a:graphicData uri="http://schemas.openxmlformats.org/drawingml/2006/chart">
-            <c:chart xmlns:r="http://schemas.openxmlformats.org/officeDocument/2006/relationships" xmlns:c="http://schemas.openxmlformats.org/drawingml/2006/chart" r:id="R76282673ac124c69"/>
+            <c:chart xmlns:r="http://schemas.openxmlformats.org/officeDocument/2006/relationships" xmlns:c="http://schemas.openxmlformats.org/drawingml/2006/chart" r:id="Ra87b14527d674dfa"/>
           </a:graphicData>
         </a:graphic>
       </p:graphicFrame>
       <p:graphicFrame>
         <p:nvGraphicFramePr>
-          <p:cNvPr id="10018" name="all flags"/>
+          <p:cNvPr id="100018" name="all flags"/>
           <p:cNvGraphicFramePr/>
           <p:nvPr/>
         </p:nvGraphicFramePr>
@@ -3653,13 +3829,13 @@
         </p:xfrm>
         <a:graphic xmlns:a="http://schemas.openxmlformats.org/drawingml/2006/main">
           <a:graphicData uri="http://schemas.openxmlformats.org/drawingml/2006/chart">
-            <c:chart xmlns:r="http://schemas.openxmlformats.org/officeDocument/2006/relationships" xmlns:c="http://schemas.openxmlformats.org/drawingml/2006/chart" r:id="R6995f749538d45fc"/>
+            <c:chart xmlns:r="http://schemas.openxmlformats.org/officeDocument/2006/relationships" xmlns:c="http://schemas.openxmlformats.org/drawingml/2006/chart" r:id="R628312e88df74ea8"/>
           </a:graphicData>
         </a:graphic>
       </p:graphicFrame>
       <p:graphicFrame>
         <p:nvGraphicFramePr>
-          <p:cNvPr id="10019" name="dataLabels=none"/>
+          <p:cNvPr id="100019" name="dataLabels=none"/>
           <p:cNvGraphicFramePr/>
           <p:nvPr/>
         </p:nvGraphicFramePr>
@@ -3669,7 +3845,7 @@
         </p:xfrm>
         <a:graphic xmlns:a="http://schemas.openxmlformats.org/drawingml/2006/main">
           <a:graphicData uri="http://schemas.openxmlformats.org/drawingml/2006/chart">
-            <c:chart xmlns:r="http://schemas.openxmlformats.org/officeDocument/2006/relationships" xmlns:c="http://schemas.openxmlformats.org/drawingml/2006/chart" r:id="R927526eb107441fb"/>
+            <c:chart xmlns:r="http://schemas.openxmlformats.org/officeDocument/2006/relationships" xmlns:c="http://schemas.openxmlformats.org/drawingml/2006/chart" r:id="R13140c744a5e40b2"/>
           </a:graphicData>
         </a:graphic>
       </p:graphicFrame>
@@ -3690,8 +3866,8 @@
       <p:grpSpPr/>
       <p:sp>
         <p:nvSpPr>
-          <p:cNvPr id="10020" name="TextBox 1"/>
-          <p:cNvSpPr/>
+          <p:cNvPr id="100020" name="TextBox 1"/>
+          <p:cNvSpPr txBox="1"/>
           <p:nvPr/>
         </p:nvSpPr>
         <p:spPr>
@@ -3718,7 +3894,7 @@
       </p:sp>
       <p:graphicFrame>
         <p:nvGraphicFramePr>
-          <p:cNvPr id="10021" name="colors="/>
+          <p:cNvPr id="100021" name="colors="/>
           <p:cNvGraphicFramePr/>
           <p:nvPr/>
         </p:nvGraphicFramePr>
@@ -3728,13 +3904,13 @@
         </p:xfrm>
         <a:graphic xmlns:a="http://schemas.openxmlformats.org/drawingml/2006/main">
           <a:graphicData uri="http://schemas.openxmlformats.org/drawingml/2006/chart">
-            <c:chart xmlns:r="http://schemas.openxmlformats.org/officeDocument/2006/relationships" xmlns:c="http://schemas.openxmlformats.org/drawingml/2006/chart" r:id="Rd5ff7f88eada4920"/>
+            <c:chart xmlns:r="http://schemas.openxmlformats.org/officeDocument/2006/relationships" xmlns:c="http://schemas.openxmlformats.org/drawingml/2006/chart" r:id="Rcbec513c50644ecf"/>
           </a:graphicData>
         </a:graphic>
       </p:graphicFrame>
       <p:graphicFrame>
         <p:nvGraphicFramePr>
-          <p:cNvPr id="10022" name="gradient + seriesshadow"/>
+          <p:cNvPr id="100022" name="gradient + seriesshadow"/>
           <p:cNvGraphicFramePr/>
           <p:nvPr/>
         </p:nvGraphicFramePr>
@@ -3744,13 +3920,13 @@
         </p:xfrm>
         <a:graphic xmlns:a="http://schemas.openxmlformats.org/drawingml/2006/main">
           <a:graphicData uri="http://schemas.openxmlformats.org/drawingml/2006/chart">
-            <c:chart xmlns:r="http://schemas.openxmlformats.org/officeDocument/2006/relationships" xmlns:c="http://schemas.openxmlformats.org/drawingml/2006/chart" r:id="R0a509272fd2f4c93"/>
+            <c:chart xmlns:r="http://schemas.openxmlformats.org/officeDocument/2006/relationships" xmlns:c="http://schemas.openxmlformats.org/drawingml/2006/chart" r:id="R154f02857b3c4533"/>
           </a:graphicData>
         </a:graphic>
       </p:graphicFrame>
       <p:graphicFrame>
         <p:nvGraphicFramePr>
-          <p:cNvPr id="10023" name="seriesoutline white"/>
+          <p:cNvPr id="100023" name="seriesoutline white"/>
           <p:cNvGraphicFramePr/>
           <p:nvPr/>
         </p:nvGraphicFramePr>
@@ -3760,13 +3936,13 @@
         </p:xfrm>
         <a:graphic xmlns:a="http://schemas.openxmlformats.org/drawingml/2006/main">
           <a:graphicData uri="http://schemas.openxmlformats.org/drawingml/2006/chart">
-            <c:chart xmlns:r="http://schemas.openxmlformats.org/officeDocument/2006/relationships" xmlns:c="http://schemas.openxmlformats.org/drawingml/2006/chart" r:id="Rd9e6af24342c48e9"/>
+            <c:chart xmlns:r="http://schemas.openxmlformats.org/officeDocument/2006/relationships" xmlns:c="http://schemas.openxmlformats.org/drawingml/2006/chart" r:id="Ra42d540a80824e3f"/>
           </a:graphicData>
         </a:graphic>
       </p:graphicFrame>
       <p:graphicFrame>
         <p:nvGraphicFramePr>
-          <p:cNvPr id="10024" name="transparency=30"/>
+          <p:cNvPr id="100024" name="transparency=30"/>
           <p:cNvGraphicFramePr/>
           <p:nvPr/>
         </p:nvGraphicFramePr>
@@ -3776,7 +3952,7 @@
         </p:xfrm>
         <a:graphic xmlns:a="http://schemas.openxmlformats.org/drawingml/2006/main">
           <a:graphicData uri="http://schemas.openxmlformats.org/drawingml/2006/chart">
-            <c:chart xmlns:r="http://schemas.openxmlformats.org/officeDocument/2006/relationships" xmlns:c="http://schemas.openxmlformats.org/drawingml/2006/chart" r:id="Rd7b765e94d0a49c8"/>
+            <c:chart xmlns:r="http://schemas.openxmlformats.org/officeDocument/2006/relationships" xmlns:c="http://schemas.openxmlformats.org/drawingml/2006/chart" r:id="R514d8ad9a5a74ae9"/>
           </a:graphicData>
         </a:graphic>
       </p:graphicFrame>
@@ -3797,8 +3973,8 @@
       <p:grpSpPr/>
       <p:sp>
         <p:nvSpPr>
-          <p:cNvPr id="10025" name="TextBox 1"/>
-          <p:cNvSpPr/>
+          <p:cNvPr id="100025" name="TextBox 1"/>
+          <p:cNvSpPr txBox="1"/>
           <p:nvPr/>
         </p:nvSpPr>
         <p:spPr>
@@ -3825,7 +4001,7 @@
       </p:sp>
       <p:graphicFrame>
         <p:nvGraphicFramePr>
-          <p:cNvPr id="10026" name="Styled title"/>
+          <p:cNvPr id="100026" name="Styled title"/>
           <p:cNvGraphicFramePr/>
           <p:nvPr/>
         </p:nvGraphicFramePr>
@@ -3835,13 +4011,13 @@
         </p:xfrm>
         <a:graphic xmlns:a="http://schemas.openxmlformats.org/drawingml/2006/main">
           <a:graphicData uri="http://schemas.openxmlformats.org/drawingml/2006/chart">
-            <c:chart xmlns:r="http://schemas.openxmlformats.org/officeDocument/2006/relationships" xmlns:c="http://schemas.openxmlformats.org/drawingml/2006/chart" r:id="R07a4854f3aea4bc6"/>
+            <c:chart xmlns:r="http://schemas.openxmlformats.org/officeDocument/2006/relationships" xmlns:c="http://schemas.openxmlformats.org/drawingml/2006/chart" r:id="Rd28593e3deba4d44"/>
           </a:graphicData>
         </a:graphic>
       </p:graphicFrame>
       <p:graphicFrame>
         <p:nvGraphicFramePr>
-          <p:cNvPr id="10027" name="legend=bottom + legendFont"/>
+          <p:cNvPr id="100027" name="legend=bottom + legendFont"/>
           <p:cNvGraphicFramePr/>
           <p:nvPr/>
         </p:nvGraphicFramePr>
@@ -3851,13 +4027,13 @@
         </p:xfrm>
         <a:graphic xmlns:a="http://schemas.openxmlformats.org/drawingml/2006/main">
           <a:graphicData uri="http://schemas.openxmlformats.org/drawingml/2006/chart">
-            <c:chart xmlns:r="http://schemas.openxmlformats.org/officeDocument/2006/relationships" xmlns:c="http://schemas.openxmlformats.org/drawingml/2006/chart" r:id="R2a751cc1794d4237"/>
+            <c:chart xmlns:r="http://schemas.openxmlformats.org/officeDocument/2006/relationships" xmlns:c="http://schemas.openxmlformats.org/drawingml/2006/chart" r:id="R14573319b3b64be4"/>
           </a:graphicData>
         </a:graphic>
       </p:graphicFrame>
       <p:graphicFrame>
         <p:nvGraphicFramePr>
-          <p:cNvPr id="10028" name="legend.overlay=true"/>
+          <p:cNvPr id="100028" name="legend.overlay=true"/>
           <p:cNvGraphicFramePr/>
           <p:nvPr/>
         </p:nvGraphicFramePr>
@@ -3867,13 +4043,13 @@
         </p:xfrm>
         <a:graphic xmlns:a="http://schemas.openxmlformats.org/drawingml/2006/main">
           <a:graphicData uri="http://schemas.openxmlformats.org/drawingml/2006/chart">
-            <c:chart xmlns:r="http://schemas.openxmlformats.org/officeDocument/2006/relationships" xmlns:c="http://schemas.openxmlformats.org/drawingml/2006/chart" r:id="R76e664cfd89546a3"/>
+            <c:chart xmlns:r="http://schemas.openxmlformats.org/officeDocument/2006/relationships" xmlns:c="http://schemas.openxmlformats.org/drawingml/2006/chart" r:id="Ra410402dc2ed457d"/>
           </a:graphicData>
         </a:graphic>
       </p:graphicFrame>
       <p:graphicFrame>
         <p:nvGraphicFramePr>
-          <p:cNvPr id="10029" name="Chart 4"/>
+          <p:cNvPr id="100029" name="Chart 4"/>
           <p:cNvGraphicFramePr/>
           <p:nvPr/>
         </p:nvGraphicFramePr>
@@ -3883,7 +4059,7 @@
         </p:xfrm>
         <a:graphic xmlns:a="http://schemas.openxmlformats.org/drawingml/2006/main">
           <a:graphicData uri="http://schemas.openxmlformats.org/drawingml/2006/chart">
-            <c:chart xmlns:r="http://schemas.openxmlformats.org/officeDocument/2006/relationships" xmlns:c="http://schemas.openxmlformats.org/drawingml/2006/chart" r:id="R59c2c6631ca64dab"/>
+            <c:chart xmlns:r="http://schemas.openxmlformats.org/officeDocument/2006/relationships" xmlns:c="http://schemas.openxmlformats.org/drawingml/2006/chart" r:id="R3559434ed76d42e5"/>
           </a:graphicData>
         </a:graphic>
       </p:graphicFrame>
@@ -3904,8 +4080,8 @@
       <p:grpSpPr/>
       <p:sp>
         <p:nvSpPr>
-          <p:cNvPr id="10030" name="TextBox 1"/>
-          <p:cNvSpPr/>
+          <p:cNvPr id="100030" name="TextBox 1"/>
+          <p:cNvSpPr txBox="1"/>
           <p:nvPr/>
         </p:nvSpPr>
         <p:spPr>
@@ -3932,7 +4108,7 @@
       </p:sp>
       <p:graphicFrame>
         <p:nvGraphicFramePr>
-          <p:cNvPr id="10031" name="chartareafill + chartborder"/>
+          <p:cNvPr id="100031" name="chartareafill + chartborder"/>
           <p:cNvGraphicFramePr/>
           <p:nvPr/>
         </p:nvGraphicFramePr>
@@ -3942,13 +4118,13 @@
         </p:xfrm>
         <a:graphic xmlns:a="http://schemas.openxmlformats.org/drawingml/2006/main">
           <a:graphicData uri="http://schemas.openxmlformats.org/drawingml/2006/chart">
-            <c:chart xmlns:r="http://schemas.openxmlformats.org/officeDocument/2006/relationships" xmlns:c="http://schemas.openxmlformats.org/drawingml/2006/chart" r:id="R044a6418504f4832"/>
+            <c:chart xmlns:r="http://schemas.openxmlformats.org/officeDocument/2006/relationships" xmlns:c="http://schemas.openxmlformats.org/drawingml/2006/chart" r:id="R7e011482c8f94344"/>
           </a:graphicData>
         </a:graphic>
       </p:graphicFrame>
       <p:graphicFrame>
         <p:nvGraphicFramePr>
-          <p:cNvPr id="10032" name="roundedcorners=true"/>
+          <p:cNvPr id="100032" name="roundedcorners=true"/>
           <p:cNvGraphicFramePr/>
           <p:nvPr/>
         </p:nvGraphicFramePr>
@@ -3958,13 +4134,13 @@
         </p:xfrm>
         <a:graphic xmlns:a="http://schemas.openxmlformats.org/drawingml/2006/main">
           <a:graphicData uri="http://schemas.openxmlformats.org/drawingml/2006/chart">
-            <c:chart xmlns:r="http://schemas.openxmlformats.org/officeDocument/2006/relationships" xmlns:c="http://schemas.openxmlformats.org/drawingml/2006/chart" r:id="Rdf26f19e1c2d4312"/>
+            <c:chart xmlns:r="http://schemas.openxmlformats.org/officeDocument/2006/relationships" xmlns:c="http://schemas.openxmlformats.org/drawingml/2006/chart" r:id="Rc33d220f7032453e"/>
           </a:graphicData>
         </a:graphic>
       </p:graphicFrame>
       <p:graphicFrame>
         <p:nvGraphicFramePr>
-          <p:cNvPr id="10033" name="plotFill=none"/>
+          <p:cNvPr id="100033" name="plotFill=none"/>
           <p:cNvGraphicFramePr/>
           <p:nvPr/>
         </p:nvGraphicFramePr>
@@ -3974,13 +4150,13 @@
         </p:xfrm>
         <a:graphic xmlns:a="http://schemas.openxmlformats.org/drawingml/2006/main">
           <a:graphicData uri="http://schemas.openxmlformats.org/drawingml/2006/chart">
-            <c:chart xmlns:r="http://schemas.openxmlformats.org/officeDocument/2006/relationships" xmlns:c="http://schemas.openxmlformats.org/drawingml/2006/chart" r:id="Rfdaa124f7543404e"/>
+            <c:chart xmlns:r="http://schemas.openxmlformats.org/officeDocument/2006/relationships" xmlns:c="http://schemas.openxmlformats.org/drawingml/2006/chart" r:id="R4337034a2827446d"/>
           </a:graphicData>
         </a:graphic>
       </p:graphicFrame>
       <p:graphicFrame>
         <p:nvGraphicFramePr>
-          <p:cNvPr id="10034" name="chartareafill=none"/>
+          <p:cNvPr id="100034" name="chartareafill=none"/>
           <p:cNvGraphicFramePr/>
           <p:nvPr/>
         </p:nvGraphicFramePr>
@@ -3990,7 +4166,7 @@
         </p:xfrm>
         <a:graphic xmlns:a="http://schemas.openxmlformats.org/drawingml/2006/main">
           <a:graphicData uri="http://schemas.openxmlformats.org/drawingml/2006/chart">
-            <c:chart xmlns:r="http://schemas.openxmlformats.org/officeDocument/2006/relationships" xmlns:c="http://schemas.openxmlformats.org/drawingml/2006/chart" r:id="Rd67bc2c654784759"/>
+            <c:chart xmlns:r="http://schemas.openxmlformats.org/officeDocument/2006/relationships" xmlns:c="http://schemas.openxmlformats.org/drawingml/2006/chart" r:id="R307a5838022a43a3"/>
           </a:graphicData>
         </a:graphic>
       </p:graphicFrame>
@@ -4011,8 +4187,8 @@
       <p:grpSpPr/>
       <p:sp>
         <p:nvSpPr>
-          <p:cNvPr id="10035" name="TextBox 1"/>
-          <p:cNvSpPr/>
+          <p:cNvPr id="100035" name="TextBox 1"/>
+          <p:cNvSpPr txBox="1"/>
           <p:nvPr/>
         </p:nvSpPr>
         <p:spPr>
@@ -4039,7 +4215,7 @@
       </p:sp>
       <p:graphicFrame>
         <p:nvGraphicFramePr>
-          <p:cNvPr id="10036" name="preset=minimal"/>
+          <p:cNvPr id="100036" name="preset=minimal"/>
           <p:cNvGraphicFramePr/>
           <p:nvPr/>
         </p:nvGraphicFramePr>
@@ -4049,13 +4225,13 @@
         </p:xfrm>
         <a:graphic xmlns:a="http://schemas.openxmlformats.org/drawingml/2006/main">
           <a:graphicData uri="http://schemas.openxmlformats.org/drawingml/2006/chart">
-            <c:chart xmlns:r="http://schemas.openxmlformats.org/officeDocument/2006/relationships" xmlns:c="http://schemas.openxmlformats.org/drawingml/2006/chart" r:id="Ra1758fe4926c4e83"/>
+            <c:chart xmlns:r="http://schemas.openxmlformats.org/officeDocument/2006/relationships" xmlns:c="http://schemas.openxmlformats.org/drawingml/2006/chart" r:id="Rcbe5a4fa809d4e22"/>
           </a:graphicData>
         </a:graphic>
       </p:graphicFrame>
       <p:graphicFrame>
         <p:nvGraphicFramePr>
-          <p:cNvPr id="10037" name="preset=dark"/>
+          <p:cNvPr id="100037" name="preset=dark"/>
           <p:cNvGraphicFramePr/>
           <p:nvPr/>
         </p:nvGraphicFramePr>
@@ -4065,13 +4241,13 @@
         </p:xfrm>
         <a:graphic xmlns:a="http://schemas.openxmlformats.org/drawingml/2006/main">
           <a:graphicData uri="http://schemas.openxmlformats.org/drawingml/2006/chart">
-            <c:chart xmlns:r="http://schemas.openxmlformats.org/officeDocument/2006/relationships" xmlns:c="http://schemas.openxmlformats.org/drawingml/2006/chart" r:id="Ra6ea1d843bca4f27"/>
+            <c:chart xmlns:r="http://schemas.openxmlformats.org/officeDocument/2006/relationships" xmlns:c="http://schemas.openxmlformats.org/drawingml/2006/chart" r:id="R00d09725f467475e"/>
           </a:graphicData>
         </a:graphic>
       </p:graphicFrame>
       <p:graphicFrame>
         <p:nvGraphicFramePr>
-          <p:cNvPr id="10038" name="preset=corporate"/>
+          <p:cNvPr id="100038" name="preset=corporate"/>
           <p:cNvGraphicFramePr/>
           <p:nvPr/>
         </p:nvGraphicFramePr>
@@ -4081,13 +4257,13 @@
         </p:xfrm>
         <a:graphic xmlns:a="http://schemas.openxmlformats.org/drawingml/2006/main">
           <a:graphicData uri="http://schemas.openxmlformats.org/drawingml/2006/chart">
-            <c:chart xmlns:r="http://schemas.openxmlformats.org/officeDocument/2006/relationships" xmlns:c="http://schemas.openxmlformats.org/drawingml/2006/chart" r:id="Rbd9cb4a78cbc4bd4"/>
+            <c:chart xmlns:r="http://schemas.openxmlformats.org/officeDocument/2006/relationships" xmlns:c="http://schemas.openxmlformats.org/drawingml/2006/chart" r:id="R8d17b1248c974478"/>
           </a:graphicData>
         </a:graphic>
       </p:graphicFrame>
       <p:graphicFrame>
         <p:nvGraphicFramePr>
-          <p:cNvPr id="10039" name="chart-series Set name+color"/>
+          <p:cNvPr id="100039" name="chart-series Set name+color"/>
           <p:cNvGraphicFramePr/>
           <p:nvPr/>
         </p:nvGraphicFramePr>
@@ -4097,7 +4273,7 @@
         </p:xfrm>
         <a:graphic xmlns:a="http://schemas.openxmlformats.org/drawingml/2006/main">
           <a:graphicData uri="http://schemas.openxmlformats.org/drawingml/2006/chart">
-            <c:chart xmlns:r="http://schemas.openxmlformats.org/officeDocument/2006/relationships" xmlns:c="http://schemas.openxmlformats.org/drawingml/2006/chart" r:id="R5b1b148aed5a4036"/>
+            <c:chart xmlns:r="http://schemas.openxmlformats.org/officeDocument/2006/relationships" xmlns:c="http://schemas.openxmlformats.org/drawingml/2006/chart" r:id="Rc9cc30ee902e4df4"/>
           </a:graphicData>
         </a:graphic>
       </p:graphicFrame>
